--- a/Nearer My God To Thee .pptx
+++ b/Nearer My God To Thee .pptx
@@ -7,9 +7,13 @@
   <p:sldIdLst>
     <p:sldId id="274" r:id="rId2"/>
     <p:sldId id="280" r:id="rId3"/>
-    <p:sldId id="281" r:id="rId4"/>
-    <p:sldId id="282" r:id="rId5"/>
-    <p:sldId id="279" r:id="rId6"/>
+    <p:sldId id="283" r:id="rId4"/>
+    <p:sldId id="281" r:id="rId5"/>
+    <p:sldId id="284" r:id="rId6"/>
+    <p:sldId id="282" r:id="rId7"/>
+    <p:sldId id="285" r:id="rId8"/>
+    <p:sldId id="279" r:id="rId9"/>
+    <p:sldId id="286" r:id="rId10"/>
   </p:sldIdLst>
   <p:sldSz cx="9144000" cy="6858000" type="screen4x3"/>
   <p:notesSz cx="6858000" cy="9144000"/>
@@ -247,7 +251,7 @@
           <a:p>
             <a:fld id="{E759A0DE-F190-5444-87AC-4719D5F20D15}" type="datetimeFigureOut">
               <a:rPr lang="en-US" smtClean="0"/>
-              <a:t>6/19/26</a:t>
+              <a:t>6/20/26</a:t>
             </a:fld>
             <a:endParaRPr lang="en-US"/>
           </a:p>
@@ -417,7 +421,7 @@
           <a:p>
             <a:fld id="{E759A0DE-F190-5444-87AC-4719D5F20D15}" type="datetimeFigureOut">
               <a:rPr lang="en-US" smtClean="0"/>
-              <a:t>6/19/26</a:t>
+              <a:t>6/20/26</a:t>
             </a:fld>
             <a:endParaRPr lang="en-US"/>
           </a:p>
@@ -597,7 +601,7 @@
           <a:p>
             <a:fld id="{E759A0DE-F190-5444-87AC-4719D5F20D15}" type="datetimeFigureOut">
               <a:rPr lang="en-US" smtClean="0"/>
-              <a:t>6/19/26</a:t>
+              <a:t>6/20/26</a:t>
             </a:fld>
             <a:endParaRPr lang="en-US"/>
           </a:p>
@@ -767,7 +771,7 @@
           <a:p>
             <a:fld id="{E759A0DE-F190-5444-87AC-4719D5F20D15}" type="datetimeFigureOut">
               <a:rPr lang="en-US" smtClean="0"/>
-              <a:t>6/19/26</a:t>
+              <a:t>6/20/26</a:t>
             </a:fld>
             <a:endParaRPr lang="en-US"/>
           </a:p>
@@ -1013,7 +1017,7 @@
           <a:p>
             <a:fld id="{E759A0DE-F190-5444-87AC-4719D5F20D15}" type="datetimeFigureOut">
               <a:rPr lang="en-US" smtClean="0"/>
-              <a:t>6/19/26</a:t>
+              <a:t>6/20/26</a:t>
             </a:fld>
             <a:endParaRPr lang="en-US"/>
           </a:p>
@@ -1245,7 +1249,7 @@
           <a:p>
             <a:fld id="{E759A0DE-F190-5444-87AC-4719D5F20D15}" type="datetimeFigureOut">
               <a:rPr lang="en-US" smtClean="0"/>
-              <a:t>6/19/26</a:t>
+              <a:t>6/20/26</a:t>
             </a:fld>
             <a:endParaRPr lang="en-US"/>
           </a:p>
@@ -1612,7 +1616,7 @@
           <a:p>
             <a:fld id="{E759A0DE-F190-5444-87AC-4719D5F20D15}" type="datetimeFigureOut">
               <a:rPr lang="en-US" smtClean="0"/>
-              <a:t>6/19/26</a:t>
+              <a:t>6/20/26</a:t>
             </a:fld>
             <a:endParaRPr lang="en-US"/>
           </a:p>
@@ -1730,7 +1734,7 @@
           <a:p>
             <a:fld id="{E759A0DE-F190-5444-87AC-4719D5F20D15}" type="datetimeFigureOut">
               <a:rPr lang="en-US" smtClean="0"/>
-              <a:t>6/19/26</a:t>
+              <a:t>6/20/26</a:t>
             </a:fld>
             <a:endParaRPr lang="en-US"/>
           </a:p>
@@ -1825,7 +1829,7 @@
           <a:p>
             <a:fld id="{E759A0DE-F190-5444-87AC-4719D5F20D15}" type="datetimeFigureOut">
               <a:rPr lang="en-US" smtClean="0"/>
-              <a:t>6/19/26</a:t>
+              <a:t>6/20/26</a:t>
             </a:fld>
             <a:endParaRPr lang="en-US"/>
           </a:p>
@@ -2102,7 +2106,7 @@
           <a:p>
             <a:fld id="{E759A0DE-F190-5444-87AC-4719D5F20D15}" type="datetimeFigureOut">
               <a:rPr lang="en-US" smtClean="0"/>
-              <a:t>6/19/26</a:t>
+              <a:t>6/20/26</a:t>
             </a:fld>
             <a:endParaRPr lang="en-US"/>
           </a:p>
@@ -2359,7 +2363,7 @@
           <a:p>
             <a:fld id="{E759A0DE-F190-5444-87AC-4719D5F20D15}" type="datetimeFigureOut">
               <a:rPr lang="en-US" smtClean="0"/>
-              <a:t>6/19/26</a:t>
+              <a:t>6/20/26</a:t>
             </a:fld>
             <a:endParaRPr lang="en-US"/>
           </a:p>
@@ -2572,7 +2576,7 @@
           <a:p>
             <a:fld id="{E759A0DE-F190-5444-87AC-4719D5F20D15}" type="datetimeFigureOut">
               <a:rPr lang="en-US" smtClean="0"/>
-              <a:t>6/19/26</a:t>
+              <a:t>6/20/26</a:t>
             </a:fld>
             <a:endParaRPr lang="en-US"/>
           </a:p>
@@ -3105,6 +3109,15 @@
           </a:bodyPr>
           <a:lstStyle/>
           <a:p>
+            <a:endParaRPr lang="en-US" sz="4000" dirty="0">
+              <a:solidFill>
+                <a:schemeClr val="bg1"/>
+              </a:solidFill>
+              <a:latin typeface="Avenir Medium" panose="02000503020000020003" pitchFamily="2" charset="0"/>
+              <a:ea typeface="Bodoni Ornaments" pitchFamily="2" charset="0"/>
+            </a:endParaRPr>
+          </a:p>
+          <a:p>
             <a:r>
               <a:rPr lang="en-US" sz="4000" dirty="0">
                 <a:solidFill>
@@ -3113,7 +3126,7 @@
                 <a:latin typeface="Avenir Medium" panose="02000503020000020003" pitchFamily="2" charset="0"/>
                 <a:ea typeface="Bodoni Ornaments" pitchFamily="2" charset="0"/>
               </a:rPr>
-              <a:t>There in my Father’s home, </a:t>
+              <a:t>Nearer, my God, to Thee </a:t>
             </a:r>
           </a:p>
           <a:p>
@@ -3125,7 +3138,7 @@
                 <a:latin typeface="Avenir Medium" panose="02000503020000020003" pitchFamily="2" charset="0"/>
                 <a:ea typeface="Bodoni Ornaments" pitchFamily="2" charset="0"/>
               </a:rPr>
-              <a:t>safe and at rest,</a:t>
+              <a:t>Nearer to Thee</a:t>
             </a:r>
           </a:p>
           <a:p>
@@ -3137,7 +3150,7 @@
                 <a:latin typeface="Avenir Medium" panose="02000503020000020003" pitchFamily="2" charset="0"/>
                 <a:ea typeface="Bodoni Ornaments" pitchFamily="2" charset="0"/>
               </a:rPr>
-              <a:t>There in my Savior’s love, </a:t>
+              <a:t>Even though it be a cross </a:t>
             </a:r>
           </a:p>
           <a:p>
@@ -3149,22 +3162,18 @@
                 <a:latin typeface="Avenir Medium" panose="02000503020000020003" pitchFamily="2" charset="0"/>
                 <a:ea typeface="Bodoni Ornaments" pitchFamily="2" charset="0"/>
               </a:rPr>
-              <a:t>perfectly blest;</a:t>
-            </a:r>
-          </a:p>
-          <a:p>
-            <a:r>
-              <a:rPr lang="en-US" sz="4000" dirty="0">
+              <a:t>That </a:t>
+            </a:r>
+            <a:r>
+              <a:rPr lang="en-US" sz="4000" dirty="0" err="1">
                 <a:solidFill>
                   <a:schemeClr val="bg1"/>
                 </a:solidFill>
                 <a:latin typeface="Avenir Medium" panose="02000503020000020003" pitchFamily="2" charset="0"/>
                 <a:ea typeface="Bodoni Ornaments" pitchFamily="2" charset="0"/>
               </a:rPr>
-              <a:t>Age after age to be </a:t>
-            </a:r>
-          </a:p>
-          <a:p>
+              <a:t>raiseth</a:t>
+            </a:r>
             <a:r>
               <a:rPr lang="en-US" sz="4000" dirty="0">
                 <a:solidFill>
@@ -3173,31 +3182,7 @@
                 <a:latin typeface="Avenir Medium" panose="02000503020000020003" pitchFamily="2" charset="0"/>
                 <a:ea typeface="Bodoni Ornaments" pitchFamily="2" charset="0"/>
               </a:rPr>
-              <a:t>Nearer my God to Thee</a:t>
-            </a:r>
-          </a:p>
-          <a:p>
-            <a:r>
-              <a:rPr lang="en-US" sz="4000" dirty="0">
-                <a:solidFill>
-                  <a:schemeClr val="bg1"/>
-                </a:solidFill>
-                <a:latin typeface="Avenir Medium" panose="02000503020000020003" pitchFamily="2" charset="0"/>
-                <a:ea typeface="Bodoni Ornaments" pitchFamily="2" charset="0"/>
-              </a:rPr>
-              <a:t>Nearer my God to Thee, </a:t>
-            </a:r>
-          </a:p>
-          <a:p>
-            <a:r>
-              <a:rPr lang="en-US" sz="4000" dirty="0">
-                <a:solidFill>
-                  <a:schemeClr val="bg1"/>
-                </a:solidFill>
-                <a:latin typeface="Avenir Medium" panose="02000503020000020003" pitchFamily="2" charset="0"/>
-                <a:ea typeface="Bodoni Ornaments" pitchFamily="2" charset="0"/>
-              </a:rPr>
-              <a:t>nearer to Thee</a:t>
+              <a:t> me</a:t>
             </a:r>
           </a:p>
           <a:p>
@@ -3240,7 +3225,7 @@
         <p:cNvPr id="1" name="">
           <a:extLst>
             <a:ext uri="{FF2B5EF4-FFF2-40B4-BE49-F238E27FC236}">
-              <a16:creationId xmlns:a16="http://schemas.microsoft.com/office/drawing/2014/main" id="{1BDB4448-A4FC-C3CC-1B20-A59C6BE70F86}"/>
+              <a16:creationId xmlns:a16="http://schemas.microsoft.com/office/drawing/2014/main" id="{B8D6D4E4-3436-CBF2-A4B5-59A6E66BB482}"/>
             </a:ext>
           </a:extLst>
         </p:cNvPr>
@@ -3260,7 +3245,7 @@
           <p:cNvPr id="3" name="Subtitle 2">
             <a:extLst>
               <a:ext uri="{FF2B5EF4-FFF2-40B4-BE49-F238E27FC236}">
-                <a16:creationId xmlns:a16="http://schemas.microsoft.com/office/drawing/2014/main" id="{B57BB30C-545E-CDC0-FCF5-67AC3943B8FC}"/>
+                <a16:creationId xmlns:a16="http://schemas.microsoft.com/office/drawing/2014/main" id="{98FBAEE8-1793-8341-65F8-2E583273C7A3}"/>
               </a:ext>
             </a:extLst>
           </p:cNvPr>
@@ -3300,7 +3285,7 @@
                 <a:latin typeface="Avenir Medium" panose="02000503020000020003" pitchFamily="2" charset="0"/>
                 <a:ea typeface="Bodoni Ornaments" pitchFamily="2" charset="0"/>
               </a:rPr>
-              <a:t>Though, like the wanderer </a:t>
+              <a:t>Still all my song shall be </a:t>
             </a:r>
           </a:p>
           <a:p>
@@ -3312,7 +3297,7 @@
                 <a:latin typeface="Avenir Medium" panose="02000503020000020003" pitchFamily="2" charset="0"/>
                 <a:ea typeface="Bodoni Ornaments" pitchFamily="2" charset="0"/>
               </a:rPr>
-              <a:t>The sun gone down</a:t>
+              <a:t>Nearer, my God, to Thee</a:t>
             </a:r>
           </a:p>
           <a:p>
@@ -3324,7 +3309,7 @@
                 <a:latin typeface="Avenir Medium" panose="02000503020000020003" pitchFamily="2" charset="0"/>
                 <a:ea typeface="Bodoni Ornaments" pitchFamily="2" charset="0"/>
               </a:rPr>
-              <a:t>Darkness be over me My rest a stone</a:t>
+              <a:t>Nearer my God to </a:t>
             </a:r>
           </a:p>
           <a:p>
@@ -3336,51 +3321,24 @@
                 <a:latin typeface="Avenir Medium" panose="02000503020000020003" pitchFamily="2" charset="0"/>
                 <a:ea typeface="Bodoni Ornaments" pitchFamily="2" charset="0"/>
               </a:rPr>
-              <a:t>Yet in my dreams I'd be Nearer, </a:t>
-            </a:r>
-          </a:p>
-          <a:p>
-            <a:r>
-              <a:rPr lang="en-US" sz="4000" dirty="0">
-                <a:solidFill>
-                  <a:schemeClr val="bg1"/>
-                </a:solidFill>
-                <a:latin typeface="Avenir Medium" panose="02000503020000020003" pitchFamily="2" charset="0"/>
-                <a:ea typeface="Bodoni Ornaments" pitchFamily="2" charset="0"/>
-              </a:rPr>
-              <a:t>my God, to Thee</a:t>
-            </a:r>
-          </a:p>
-          <a:p>
-            <a:r>
-              <a:rPr lang="en-US" sz="4000" dirty="0">
-                <a:solidFill>
-                  <a:schemeClr val="bg1"/>
-                </a:solidFill>
-                <a:latin typeface="Avenir Medium" panose="02000503020000020003" pitchFamily="2" charset="0"/>
-                <a:ea typeface="Bodoni Ornaments" pitchFamily="2" charset="0"/>
-              </a:rPr>
-              <a:t>Nearer my God to Thee, </a:t>
-            </a:r>
-          </a:p>
-          <a:p>
-            <a:r>
-              <a:rPr lang="en-US" sz="4000" dirty="0">
-                <a:solidFill>
-                  <a:schemeClr val="bg1"/>
-                </a:solidFill>
-                <a:latin typeface="Avenir Medium" panose="02000503020000020003" pitchFamily="2" charset="0"/>
-                <a:ea typeface="Bodoni Ornaments" pitchFamily="2" charset="0"/>
-              </a:rPr>
-              <a:t>nearer to Thee</a:t>
-            </a:r>
+              <a:t>Thee, nearer to Thee</a:t>
+            </a:r>
+          </a:p>
+          <a:p>
+            <a:endParaRPr lang="en-US" sz="4000" dirty="0">
+              <a:solidFill>
+                <a:schemeClr val="bg1"/>
+              </a:solidFill>
+              <a:latin typeface="Avenir Medium" panose="02000503020000020003" pitchFamily="2" charset="0"/>
+              <a:ea typeface="Bodoni Ornaments" pitchFamily="2" charset="0"/>
+            </a:endParaRPr>
           </a:p>
         </p:txBody>
       </p:sp>
     </p:spTree>
     <p:extLst>
       <p:ext uri="{BB962C8B-B14F-4D97-AF65-F5344CB8AC3E}">
-        <p14:creationId xmlns:p14="http://schemas.microsoft.com/office/powerpoint/2010/main" val="2169572336"/>
+        <p14:creationId xmlns:p14="http://schemas.microsoft.com/office/powerpoint/2010/main" val="1399874866"/>
       </p:ext>
     </p:extLst>
   </p:cSld>
@@ -3406,7 +3364,7 @@
         <p:cNvPr id="1" name="">
           <a:extLst>
             <a:ext uri="{FF2B5EF4-FFF2-40B4-BE49-F238E27FC236}">
-              <a16:creationId xmlns:a16="http://schemas.microsoft.com/office/drawing/2014/main" id="{89FB3FFC-5C14-5F00-F8C5-8604213D338C}"/>
+              <a16:creationId xmlns:a16="http://schemas.microsoft.com/office/drawing/2014/main" id="{2E5EEBEC-52CD-CF56-0DFD-2F05427B0885}"/>
             </a:ext>
           </a:extLst>
         </p:cNvPr>
@@ -3426,7 +3384,7 @@
           <p:cNvPr id="3" name="Subtitle 2">
             <a:extLst>
               <a:ext uri="{FF2B5EF4-FFF2-40B4-BE49-F238E27FC236}">
-                <a16:creationId xmlns:a16="http://schemas.microsoft.com/office/drawing/2014/main" id="{925C7A0A-2AF6-903F-5A30-02AC9CE21E0D}"/>
+                <a16:creationId xmlns:a16="http://schemas.microsoft.com/office/drawing/2014/main" id="{DA6609E3-0ED7-B159-59DB-7CE4DB1468A3}"/>
               </a:ext>
             </a:extLst>
           </p:cNvPr>
@@ -3466,7 +3424,7 @@
                 <a:latin typeface="Avenir Medium" panose="02000503020000020003" pitchFamily="2" charset="0"/>
                 <a:ea typeface="Bodoni Ornaments" pitchFamily="2" charset="0"/>
               </a:rPr>
-              <a:t>Then, with my waking thoughts Bright with Thy praise</a:t>
+              <a:t>Though, like the wanderer </a:t>
             </a:r>
           </a:p>
           <a:p>
@@ -3478,7 +3436,7 @@
                 <a:latin typeface="Avenir Medium" panose="02000503020000020003" pitchFamily="2" charset="0"/>
                 <a:ea typeface="Bodoni Ornaments" pitchFamily="2" charset="0"/>
               </a:rPr>
-              <a:t>Out of my stony griefs Bethel I'll raise</a:t>
+              <a:t>The sun gone down</a:t>
             </a:r>
           </a:p>
           <a:p>
@@ -3490,7 +3448,7 @@
                 <a:latin typeface="Avenir Medium" panose="02000503020000020003" pitchFamily="2" charset="0"/>
                 <a:ea typeface="Bodoni Ornaments" pitchFamily="2" charset="0"/>
               </a:rPr>
-              <a:t>So by my woes to be Nearer, </a:t>
+              <a:t>Darkness be over me </a:t>
             </a:r>
           </a:p>
           <a:p>
@@ -3502,39 +3460,24 @@
                 <a:latin typeface="Avenir Medium" panose="02000503020000020003" pitchFamily="2" charset="0"/>
                 <a:ea typeface="Bodoni Ornaments" pitchFamily="2" charset="0"/>
               </a:rPr>
-              <a:t>my God, to Thee</a:t>
-            </a:r>
-          </a:p>
-          <a:p>
-            <a:r>
-              <a:rPr lang="en-US" sz="4000" dirty="0">
-                <a:solidFill>
-                  <a:schemeClr val="bg1"/>
-                </a:solidFill>
-                <a:latin typeface="Avenir Medium" panose="02000503020000020003" pitchFamily="2" charset="0"/>
-                <a:ea typeface="Bodoni Ornaments" pitchFamily="2" charset="0"/>
-              </a:rPr>
-              <a:t>Nearer my God to Thee, </a:t>
-            </a:r>
-          </a:p>
-          <a:p>
-            <a:r>
-              <a:rPr lang="en-US" sz="4000" dirty="0">
-                <a:solidFill>
-                  <a:schemeClr val="bg1"/>
-                </a:solidFill>
-                <a:latin typeface="Avenir Medium" panose="02000503020000020003" pitchFamily="2" charset="0"/>
-                <a:ea typeface="Bodoni Ornaments" pitchFamily="2" charset="0"/>
-              </a:rPr>
-              <a:t>nearer to Thee</a:t>
-            </a:r>
+              <a:t>My rest a stone</a:t>
+            </a:r>
+          </a:p>
+          <a:p>
+            <a:endParaRPr lang="en-US" sz="4000" dirty="0">
+              <a:solidFill>
+                <a:schemeClr val="bg1"/>
+              </a:solidFill>
+              <a:latin typeface="Avenir Medium" panose="02000503020000020003" pitchFamily="2" charset="0"/>
+              <a:ea typeface="Bodoni Ornaments" pitchFamily="2" charset="0"/>
+            </a:endParaRPr>
           </a:p>
         </p:txBody>
       </p:sp>
     </p:spTree>
     <p:extLst>
       <p:ext uri="{BB962C8B-B14F-4D97-AF65-F5344CB8AC3E}">
-        <p14:creationId xmlns:p14="http://schemas.microsoft.com/office/powerpoint/2010/main" val="2859124094"/>
+        <p14:creationId xmlns:p14="http://schemas.microsoft.com/office/powerpoint/2010/main" val="3977132080"/>
       </p:ext>
     </p:extLst>
   </p:cSld>
@@ -3545,6 +3488,411 @@
 </file>
 
 <file path=ppt/slides/slide5.xml><?xml version="1.0" encoding="utf-8"?>
+<p:sld xmlns:a="http://schemas.openxmlformats.org/drawingml/2006/main" xmlns:r="http://schemas.openxmlformats.org/officeDocument/2006/relationships" xmlns:p="http://schemas.openxmlformats.org/presentationml/2006/main">
+  <p:cSld>
+    <p:bg>
+      <p:bgPr>
+        <a:solidFill>
+          <a:schemeClr val="tx1"/>
+        </a:solidFill>
+        <a:effectLst/>
+      </p:bgPr>
+    </p:bg>
+    <p:spTree>
+      <p:nvGrpSpPr>
+        <p:cNvPr id="1" name="">
+          <a:extLst>
+            <a:ext uri="{FF2B5EF4-FFF2-40B4-BE49-F238E27FC236}">
+              <a16:creationId xmlns:a16="http://schemas.microsoft.com/office/drawing/2014/main" id="{396BA297-6137-4473-23F3-1346EFA58088}"/>
+            </a:ext>
+          </a:extLst>
+        </p:cNvPr>
+        <p:cNvGrpSpPr/>
+        <p:nvPr/>
+      </p:nvGrpSpPr>
+      <p:grpSpPr>
+        <a:xfrm>
+          <a:off x="0" y="0"/>
+          <a:ext cx="0" cy="0"/>
+          <a:chOff x="0" y="0"/>
+          <a:chExt cx="0" cy="0"/>
+        </a:xfrm>
+      </p:grpSpPr>
+      <p:sp>
+        <p:nvSpPr>
+          <p:cNvPr id="3" name="Subtitle 2">
+            <a:extLst>
+              <a:ext uri="{FF2B5EF4-FFF2-40B4-BE49-F238E27FC236}">
+                <a16:creationId xmlns:a16="http://schemas.microsoft.com/office/drawing/2014/main" id="{3E3D450C-04B2-7B8A-72C0-5C20B725B2C5}"/>
+              </a:ext>
+            </a:extLst>
+          </p:cNvPr>
+          <p:cNvSpPr>
+            <a:spLocks noGrp="1"/>
+          </p:cNvSpPr>
+          <p:nvPr>
+            <p:ph type="subTitle" idx="1"/>
+          </p:nvPr>
+        </p:nvSpPr>
+        <p:spPr>
+          <a:xfrm>
+            <a:off x="84221" y="213360"/>
+            <a:ext cx="8891337" cy="6416040"/>
+          </a:xfrm>
+        </p:spPr>
+        <p:txBody>
+          <a:bodyPr>
+            <a:noAutofit/>
+          </a:bodyPr>
+          <a:lstStyle/>
+          <a:p>
+            <a:endParaRPr lang="en-US" sz="4000" dirty="0">
+              <a:solidFill>
+                <a:schemeClr val="bg1"/>
+              </a:solidFill>
+              <a:latin typeface="Avenir Medium" panose="02000503020000020003" pitchFamily="2" charset="0"/>
+              <a:ea typeface="Bodoni Ornaments" pitchFamily="2" charset="0"/>
+            </a:endParaRPr>
+          </a:p>
+          <a:p>
+            <a:r>
+              <a:rPr lang="en-US" sz="4000" dirty="0">
+                <a:solidFill>
+                  <a:schemeClr val="bg1"/>
+                </a:solidFill>
+                <a:latin typeface="Avenir Medium" panose="02000503020000020003" pitchFamily="2" charset="0"/>
+                <a:ea typeface="Bodoni Ornaments" pitchFamily="2" charset="0"/>
+              </a:rPr>
+              <a:t>Yet in my dreams I'd be </a:t>
+            </a:r>
+          </a:p>
+          <a:p>
+            <a:r>
+              <a:rPr lang="en-US" sz="4000" dirty="0">
+                <a:solidFill>
+                  <a:schemeClr val="bg1"/>
+                </a:solidFill>
+                <a:latin typeface="Avenir Medium" panose="02000503020000020003" pitchFamily="2" charset="0"/>
+                <a:ea typeface="Bodoni Ornaments" pitchFamily="2" charset="0"/>
+              </a:rPr>
+              <a:t>Nearer, my God, to Thee</a:t>
+            </a:r>
+          </a:p>
+          <a:p>
+            <a:r>
+              <a:rPr lang="en-US" sz="4000" dirty="0">
+                <a:solidFill>
+                  <a:schemeClr val="bg1"/>
+                </a:solidFill>
+                <a:latin typeface="Avenir Medium" panose="02000503020000020003" pitchFamily="2" charset="0"/>
+                <a:ea typeface="Bodoni Ornaments" pitchFamily="2" charset="0"/>
+              </a:rPr>
+              <a:t>Nearer my God to Thee, </a:t>
+            </a:r>
+          </a:p>
+          <a:p>
+            <a:r>
+              <a:rPr lang="en-US" sz="4000" dirty="0">
+                <a:solidFill>
+                  <a:schemeClr val="bg1"/>
+                </a:solidFill>
+                <a:latin typeface="Avenir Medium" panose="02000503020000020003" pitchFamily="2" charset="0"/>
+                <a:ea typeface="Bodoni Ornaments" pitchFamily="2" charset="0"/>
+              </a:rPr>
+              <a:t>nearer to Thee</a:t>
+            </a:r>
+          </a:p>
+          <a:p>
+            <a:endParaRPr lang="en-US" sz="4000" dirty="0">
+              <a:solidFill>
+                <a:schemeClr val="bg1"/>
+              </a:solidFill>
+              <a:latin typeface="Avenir Medium" panose="02000503020000020003" pitchFamily="2" charset="0"/>
+              <a:ea typeface="Bodoni Ornaments" pitchFamily="2" charset="0"/>
+            </a:endParaRPr>
+          </a:p>
+        </p:txBody>
+      </p:sp>
+    </p:spTree>
+    <p:extLst>
+      <p:ext uri="{BB962C8B-B14F-4D97-AF65-F5344CB8AC3E}">
+        <p14:creationId xmlns:p14="http://schemas.microsoft.com/office/powerpoint/2010/main" val="546302948"/>
+      </p:ext>
+    </p:extLst>
+  </p:cSld>
+  <p:clrMapOvr>
+    <a:masterClrMapping/>
+  </p:clrMapOvr>
+</p:sld>
+</file>
+
+<file path=ppt/slides/slide6.xml><?xml version="1.0" encoding="utf-8"?>
+<p:sld xmlns:a="http://schemas.openxmlformats.org/drawingml/2006/main" xmlns:r="http://schemas.openxmlformats.org/officeDocument/2006/relationships" xmlns:p="http://schemas.openxmlformats.org/presentationml/2006/main">
+  <p:cSld>
+    <p:bg>
+      <p:bgPr>
+        <a:solidFill>
+          <a:schemeClr val="tx1"/>
+        </a:solidFill>
+        <a:effectLst/>
+      </p:bgPr>
+    </p:bg>
+    <p:spTree>
+      <p:nvGrpSpPr>
+        <p:cNvPr id="1" name="">
+          <a:extLst>
+            <a:ext uri="{FF2B5EF4-FFF2-40B4-BE49-F238E27FC236}">
+              <a16:creationId xmlns:a16="http://schemas.microsoft.com/office/drawing/2014/main" id="{76EA7B05-9336-454D-AD77-614A2C1D019B}"/>
+            </a:ext>
+          </a:extLst>
+        </p:cNvPr>
+        <p:cNvGrpSpPr/>
+        <p:nvPr/>
+      </p:nvGrpSpPr>
+      <p:grpSpPr>
+        <a:xfrm>
+          <a:off x="0" y="0"/>
+          <a:ext cx="0" cy="0"/>
+          <a:chOff x="0" y="0"/>
+          <a:chExt cx="0" cy="0"/>
+        </a:xfrm>
+      </p:grpSpPr>
+      <p:sp>
+        <p:nvSpPr>
+          <p:cNvPr id="3" name="Subtitle 2">
+            <a:extLst>
+              <a:ext uri="{FF2B5EF4-FFF2-40B4-BE49-F238E27FC236}">
+                <a16:creationId xmlns:a16="http://schemas.microsoft.com/office/drawing/2014/main" id="{FD919AE2-A258-96C6-2FD8-01BFCBCECAE6}"/>
+              </a:ext>
+            </a:extLst>
+          </p:cNvPr>
+          <p:cNvSpPr>
+            <a:spLocks noGrp="1"/>
+          </p:cNvSpPr>
+          <p:nvPr>
+            <p:ph type="subTitle" idx="1"/>
+          </p:nvPr>
+        </p:nvSpPr>
+        <p:spPr>
+          <a:xfrm>
+            <a:off x="84221" y="213360"/>
+            <a:ext cx="8891337" cy="6416040"/>
+          </a:xfrm>
+        </p:spPr>
+        <p:txBody>
+          <a:bodyPr>
+            <a:noAutofit/>
+          </a:bodyPr>
+          <a:lstStyle/>
+          <a:p>
+            <a:endParaRPr lang="en-US" sz="4000" dirty="0">
+              <a:solidFill>
+                <a:schemeClr val="bg1"/>
+              </a:solidFill>
+              <a:latin typeface="Avenir Medium" panose="02000503020000020003" pitchFamily="2" charset="0"/>
+              <a:ea typeface="Bodoni Ornaments" pitchFamily="2" charset="0"/>
+            </a:endParaRPr>
+          </a:p>
+          <a:p>
+            <a:r>
+              <a:rPr lang="en-US" sz="4000" dirty="0">
+                <a:solidFill>
+                  <a:schemeClr val="bg1"/>
+                </a:solidFill>
+                <a:latin typeface="Avenir Medium" panose="02000503020000020003" pitchFamily="2" charset="0"/>
+                <a:ea typeface="Bodoni Ornaments" pitchFamily="2" charset="0"/>
+              </a:rPr>
+              <a:t>Then, with my waking thoughts Bright with Thy praise</a:t>
+            </a:r>
+          </a:p>
+          <a:p>
+            <a:r>
+              <a:rPr lang="en-US" sz="4000" dirty="0">
+                <a:solidFill>
+                  <a:schemeClr val="bg1"/>
+                </a:solidFill>
+                <a:latin typeface="Avenir Medium" panose="02000503020000020003" pitchFamily="2" charset="0"/>
+                <a:ea typeface="Bodoni Ornaments" pitchFamily="2" charset="0"/>
+              </a:rPr>
+              <a:t>Out of my stony griefs </a:t>
+            </a:r>
+          </a:p>
+          <a:p>
+            <a:r>
+              <a:rPr lang="en-US" sz="4000" dirty="0">
+                <a:solidFill>
+                  <a:schemeClr val="bg1"/>
+                </a:solidFill>
+                <a:latin typeface="Avenir Medium" panose="02000503020000020003" pitchFamily="2" charset="0"/>
+                <a:ea typeface="Bodoni Ornaments" pitchFamily="2" charset="0"/>
+              </a:rPr>
+              <a:t>Bethel I'll raise</a:t>
+            </a:r>
+          </a:p>
+          <a:p>
+            <a:endParaRPr lang="en-US" sz="4000" dirty="0">
+              <a:solidFill>
+                <a:schemeClr val="bg1"/>
+              </a:solidFill>
+              <a:latin typeface="Avenir Medium" panose="02000503020000020003" pitchFamily="2" charset="0"/>
+              <a:ea typeface="Bodoni Ornaments" pitchFamily="2" charset="0"/>
+            </a:endParaRPr>
+          </a:p>
+        </p:txBody>
+      </p:sp>
+    </p:spTree>
+    <p:extLst>
+      <p:ext uri="{BB962C8B-B14F-4D97-AF65-F5344CB8AC3E}">
+        <p14:creationId xmlns:p14="http://schemas.microsoft.com/office/powerpoint/2010/main" val="2539113363"/>
+      </p:ext>
+    </p:extLst>
+  </p:cSld>
+  <p:clrMapOvr>
+    <a:masterClrMapping/>
+  </p:clrMapOvr>
+</p:sld>
+</file>
+
+<file path=ppt/slides/slide7.xml><?xml version="1.0" encoding="utf-8"?>
+<p:sld xmlns:a="http://schemas.openxmlformats.org/drawingml/2006/main" xmlns:r="http://schemas.openxmlformats.org/officeDocument/2006/relationships" xmlns:p="http://schemas.openxmlformats.org/presentationml/2006/main">
+  <p:cSld>
+    <p:bg>
+      <p:bgPr>
+        <a:solidFill>
+          <a:schemeClr val="tx1"/>
+        </a:solidFill>
+        <a:effectLst/>
+      </p:bgPr>
+    </p:bg>
+    <p:spTree>
+      <p:nvGrpSpPr>
+        <p:cNvPr id="1" name="">
+          <a:extLst>
+            <a:ext uri="{FF2B5EF4-FFF2-40B4-BE49-F238E27FC236}">
+              <a16:creationId xmlns:a16="http://schemas.microsoft.com/office/drawing/2014/main" id="{885C569D-46F9-74F5-F62B-07E244D42116}"/>
+            </a:ext>
+          </a:extLst>
+        </p:cNvPr>
+        <p:cNvGrpSpPr/>
+        <p:nvPr/>
+      </p:nvGrpSpPr>
+      <p:grpSpPr>
+        <a:xfrm>
+          <a:off x="0" y="0"/>
+          <a:ext cx="0" cy="0"/>
+          <a:chOff x="0" y="0"/>
+          <a:chExt cx="0" cy="0"/>
+        </a:xfrm>
+      </p:grpSpPr>
+      <p:sp>
+        <p:nvSpPr>
+          <p:cNvPr id="3" name="Subtitle 2">
+            <a:extLst>
+              <a:ext uri="{FF2B5EF4-FFF2-40B4-BE49-F238E27FC236}">
+                <a16:creationId xmlns:a16="http://schemas.microsoft.com/office/drawing/2014/main" id="{7B3A4D92-4903-B1AF-3E73-46F2C5426FB4}"/>
+              </a:ext>
+            </a:extLst>
+          </p:cNvPr>
+          <p:cNvSpPr>
+            <a:spLocks noGrp="1"/>
+          </p:cNvSpPr>
+          <p:nvPr>
+            <p:ph type="subTitle" idx="1"/>
+          </p:nvPr>
+        </p:nvSpPr>
+        <p:spPr>
+          <a:xfrm>
+            <a:off x="84221" y="213360"/>
+            <a:ext cx="8891337" cy="6416040"/>
+          </a:xfrm>
+        </p:spPr>
+        <p:txBody>
+          <a:bodyPr>
+            <a:noAutofit/>
+          </a:bodyPr>
+          <a:lstStyle/>
+          <a:p>
+            <a:endParaRPr lang="en-US" sz="4000" dirty="0">
+              <a:solidFill>
+                <a:schemeClr val="bg1"/>
+              </a:solidFill>
+              <a:latin typeface="Avenir Medium" panose="02000503020000020003" pitchFamily="2" charset="0"/>
+              <a:ea typeface="Bodoni Ornaments" pitchFamily="2" charset="0"/>
+            </a:endParaRPr>
+          </a:p>
+          <a:p>
+            <a:r>
+              <a:rPr lang="en-US" sz="4000" dirty="0">
+                <a:solidFill>
+                  <a:schemeClr val="bg1"/>
+                </a:solidFill>
+                <a:latin typeface="Avenir Medium" panose="02000503020000020003" pitchFamily="2" charset="0"/>
+                <a:ea typeface="Bodoni Ornaments" pitchFamily="2" charset="0"/>
+              </a:rPr>
+              <a:t>So by my woes to be </a:t>
+            </a:r>
+          </a:p>
+          <a:p>
+            <a:r>
+              <a:rPr lang="en-US" sz="4000" dirty="0">
+                <a:solidFill>
+                  <a:schemeClr val="bg1"/>
+                </a:solidFill>
+                <a:latin typeface="Avenir Medium" panose="02000503020000020003" pitchFamily="2" charset="0"/>
+                <a:ea typeface="Bodoni Ornaments" pitchFamily="2" charset="0"/>
+              </a:rPr>
+              <a:t>Nearer, my God, to Thee</a:t>
+            </a:r>
+          </a:p>
+          <a:p>
+            <a:r>
+              <a:rPr lang="en-US" sz="4000" dirty="0">
+                <a:solidFill>
+                  <a:schemeClr val="bg1"/>
+                </a:solidFill>
+                <a:latin typeface="Avenir Medium" panose="02000503020000020003" pitchFamily="2" charset="0"/>
+                <a:ea typeface="Bodoni Ornaments" pitchFamily="2" charset="0"/>
+              </a:rPr>
+              <a:t>Nearer my God to Thee, </a:t>
+            </a:r>
+          </a:p>
+          <a:p>
+            <a:r>
+              <a:rPr lang="en-US" sz="4000" dirty="0">
+                <a:solidFill>
+                  <a:schemeClr val="bg1"/>
+                </a:solidFill>
+                <a:latin typeface="Avenir Medium" panose="02000503020000020003" pitchFamily="2" charset="0"/>
+                <a:ea typeface="Bodoni Ornaments" pitchFamily="2" charset="0"/>
+              </a:rPr>
+              <a:t>nearer to Thee</a:t>
+            </a:r>
+          </a:p>
+          <a:p>
+            <a:endParaRPr lang="en-US" sz="4000" dirty="0">
+              <a:solidFill>
+                <a:schemeClr val="bg1"/>
+              </a:solidFill>
+              <a:latin typeface="Avenir Medium" panose="02000503020000020003" pitchFamily="2" charset="0"/>
+              <a:ea typeface="Bodoni Ornaments" pitchFamily="2" charset="0"/>
+            </a:endParaRPr>
+          </a:p>
+        </p:txBody>
+      </p:sp>
+    </p:spTree>
+    <p:extLst>
+      <p:ext uri="{BB962C8B-B14F-4D97-AF65-F5344CB8AC3E}">
+        <p14:creationId xmlns:p14="http://schemas.microsoft.com/office/powerpoint/2010/main" val="1399821193"/>
+      </p:ext>
+    </p:extLst>
+  </p:cSld>
+  <p:clrMapOvr>
+    <a:masterClrMapping/>
+  </p:clrMapOvr>
+</p:sld>
+</file>
+
+<file path=ppt/slides/slide8.xml><?xml version="1.0" encoding="utf-8"?>
 <p:sld xmlns:a="http://schemas.openxmlformats.org/drawingml/2006/main" xmlns:r="http://schemas.openxmlformats.org/officeDocument/2006/relationships" xmlns:p="http://schemas.openxmlformats.org/presentationml/2006/main">
   <p:cSld>
     <p:bg>
@@ -3594,7 +3942,7 @@
         <p:spPr>
           <a:xfrm>
             <a:off x="144379" y="228600"/>
-            <a:ext cx="8903369" cy="6431280"/>
+            <a:ext cx="8903369" cy="5979160"/>
           </a:xfrm>
         </p:spPr>
         <p:txBody>
@@ -3602,121 +3950,6 @@
             <a:noAutofit/>
           </a:bodyPr>
           <a:lstStyle/>
-          <a:p>
-            <a:endParaRPr lang="en-US" sz="4000">
-              <a:solidFill>
-                <a:schemeClr val="bg1"/>
-              </a:solidFill>
-              <a:latin typeface="Avenir Medium" panose="02000503020000020003" pitchFamily="2" charset="0"/>
-              <a:ea typeface="Bodoni Ornaments" pitchFamily="2" charset="0"/>
-            </a:endParaRPr>
-          </a:p>
-          <a:p>
-            <a:r>
-              <a:rPr lang="en-US" sz="4000">
-                <a:solidFill>
-                  <a:schemeClr val="bg1"/>
-                </a:solidFill>
-                <a:latin typeface="Avenir Medium" panose="02000503020000020003" pitchFamily="2" charset="0"/>
-                <a:ea typeface="Bodoni Ornaments" pitchFamily="2" charset="0"/>
-              </a:rPr>
-              <a:t>There </a:t>
-            </a:r>
-            <a:r>
-              <a:rPr lang="en-US" sz="4000" dirty="0">
-                <a:solidFill>
-                  <a:schemeClr val="bg1"/>
-                </a:solidFill>
-                <a:latin typeface="Avenir Medium" panose="02000503020000020003" pitchFamily="2" charset="0"/>
-                <a:ea typeface="Bodoni Ornaments" pitchFamily="2" charset="0"/>
-              </a:rPr>
-              <a:t>in my Father’s home, </a:t>
-            </a:r>
-          </a:p>
-          <a:p>
-            <a:r>
-              <a:rPr lang="en-US" sz="4000" dirty="0">
-                <a:solidFill>
-                  <a:schemeClr val="bg1"/>
-                </a:solidFill>
-                <a:latin typeface="Avenir Medium" panose="02000503020000020003" pitchFamily="2" charset="0"/>
-                <a:ea typeface="Bodoni Ornaments" pitchFamily="2" charset="0"/>
-              </a:rPr>
-              <a:t>safe and at rest,</a:t>
-            </a:r>
-          </a:p>
-          <a:p>
-            <a:r>
-              <a:rPr lang="en-US" sz="4000" dirty="0">
-                <a:solidFill>
-                  <a:schemeClr val="bg1"/>
-                </a:solidFill>
-                <a:latin typeface="Avenir Medium" panose="02000503020000020003" pitchFamily="2" charset="0"/>
-                <a:ea typeface="Bodoni Ornaments" pitchFamily="2" charset="0"/>
-              </a:rPr>
-              <a:t>There in my Savior’s love, </a:t>
-            </a:r>
-          </a:p>
-          <a:p>
-            <a:r>
-              <a:rPr lang="en-US" sz="4000" dirty="0">
-                <a:solidFill>
-                  <a:schemeClr val="bg1"/>
-                </a:solidFill>
-                <a:latin typeface="Avenir Medium" panose="02000503020000020003" pitchFamily="2" charset="0"/>
-                <a:ea typeface="Bodoni Ornaments" pitchFamily="2" charset="0"/>
-              </a:rPr>
-              <a:t>perfectly blest;</a:t>
-            </a:r>
-          </a:p>
-          <a:p>
-            <a:r>
-              <a:rPr lang="en-US" sz="4000" dirty="0">
-                <a:solidFill>
-                  <a:schemeClr val="bg1"/>
-                </a:solidFill>
-                <a:latin typeface="Avenir Medium" panose="02000503020000020003" pitchFamily="2" charset="0"/>
-                <a:ea typeface="Bodoni Ornaments" pitchFamily="2" charset="0"/>
-              </a:rPr>
-              <a:t>Age after age to be </a:t>
-            </a:r>
-          </a:p>
-          <a:p>
-            <a:r>
-              <a:rPr lang="en-US" sz="4000" dirty="0">
-                <a:solidFill>
-                  <a:schemeClr val="bg1"/>
-                </a:solidFill>
-                <a:latin typeface="Avenir Medium" panose="02000503020000020003" pitchFamily="2" charset="0"/>
-                <a:ea typeface="Bodoni Ornaments" pitchFamily="2" charset="0"/>
-              </a:rPr>
-              <a:t>Nearer my God to Thee</a:t>
-            </a:r>
-          </a:p>
-          <a:p>
-            <a:r>
-              <a:rPr lang="en-US" sz="4000" dirty="0">
-                <a:solidFill>
-                  <a:schemeClr val="bg1"/>
-                </a:solidFill>
-                <a:latin typeface="Avenir Medium" panose="02000503020000020003" pitchFamily="2" charset="0"/>
-                <a:ea typeface="Bodoni Ornaments" pitchFamily="2" charset="0"/>
-              </a:rPr>
-              <a:t>Nearer my God to Thee, </a:t>
-            </a:r>
-          </a:p>
-          <a:p>
-            <a:r>
-              <a:rPr lang="en-US" sz="4000" dirty="0">
-                <a:solidFill>
-                  <a:schemeClr val="bg1"/>
-                </a:solidFill>
-                <a:latin typeface="Avenir Medium" panose="02000503020000020003" pitchFamily="2" charset="0"/>
-                <a:ea typeface="Bodoni Ornaments" pitchFamily="2" charset="0"/>
-              </a:rPr>
-              <a:t>nearer to Thee</a:t>
-            </a:r>
-          </a:p>
           <a:p>
             <a:endParaRPr lang="en-US" sz="4000" dirty="0">
               <a:solidFill>
@@ -3726,6 +3959,202 @@
               <a:ea typeface="Bodoni Ornaments" pitchFamily="2" charset="0"/>
             </a:endParaRPr>
           </a:p>
+          <a:p>
+            <a:r>
+              <a:rPr lang="en-US" sz="4000" dirty="0">
+                <a:solidFill>
+                  <a:schemeClr val="bg1"/>
+                </a:solidFill>
+                <a:latin typeface="Avenir Medium" panose="02000503020000020003" pitchFamily="2" charset="0"/>
+                <a:ea typeface="Bodoni Ornaments" pitchFamily="2" charset="0"/>
+              </a:rPr>
+              <a:t>There in my Father’s home, </a:t>
+            </a:r>
+          </a:p>
+          <a:p>
+            <a:r>
+              <a:rPr lang="en-US" sz="4000" dirty="0">
+                <a:solidFill>
+                  <a:schemeClr val="bg1"/>
+                </a:solidFill>
+                <a:latin typeface="Avenir Medium" panose="02000503020000020003" pitchFamily="2" charset="0"/>
+                <a:ea typeface="Bodoni Ornaments" pitchFamily="2" charset="0"/>
+              </a:rPr>
+              <a:t>safe and at rest,</a:t>
+            </a:r>
+          </a:p>
+          <a:p>
+            <a:r>
+              <a:rPr lang="en-US" sz="4000" dirty="0">
+                <a:solidFill>
+                  <a:schemeClr val="bg1"/>
+                </a:solidFill>
+                <a:latin typeface="Avenir Medium" panose="02000503020000020003" pitchFamily="2" charset="0"/>
+                <a:ea typeface="Bodoni Ornaments" pitchFamily="2" charset="0"/>
+              </a:rPr>
+              <a:t>There in my Savior’s love, </a:t>
+            </a:r>
+          </a:p>
+          <a:p>
+            <a:r>
+              <a:rPr lang="en-US" sz="4000" dirty="0">
+                <a:solidFill>
+                  <a:schemeClr val="bg1"/>
+                </a:solidFill>
+                <a:latin typeface="Avenir Medium" panose="02000503020000020003" pitchFamily="2" charset="0"/>
+                <a:ea typeface="Bodoni Ornaments" pitchFamily="2" charset="0"/>
+              </a:rPr>
+              <a:t>perfectly blest;</a:t>
+            </a:r>
+          </a:p>
+          <a:p>
+            <a:endParaRPr lang="en-US" sz="4000" dirty="0">
+              <a:solidFill>
+                <a:schemeClr val="bg1"/>
+              </a:solidFill>
+              <a:latin typeface="Avenir Medium" panose="02000503020000020003" pitchFamily="2" charset="0"/>
+              <a:ea typeface="Bodoni Ornaments" pitchFamily="2" charset="0"/>
+            </a:endParaRPr>
+          </a:p>
+        </p:txBody>
+      </p:sp>
+    </p:spTree>
+    <p:extLst>
+      <p:ext uri="{BB962C8B-B14F-4D97-AF65-F5344CB8AC3E}">
+        <p14:creationId xmlns:p14="http://schemas.microsoft.com/office/powerpoint/2010/main" val="2718413055"/>
+      </p:ext>
+    </p:extLst>
+  </p:cSld>
+  <p:clrMapOvr>
+    <a:masterClrMapping/>
+  </p:clrMapOvr>
+</p:sld>
+</file>
+
+<file path=ppt/slides/slide9.xml><?xml version="1.0" encoding="utf-8"?>
+<p:sld xmlns:a="http://schemas.openxmlformats.org/drawingml/2006/main" xmlns:r="http://schemas.openxmlformats.org/officeDocument/2006/relationships" xmlns:p="http://schemas.openxmlformats.org/presentationml/2006/main">
+  <p:cSld>
+    <p:bg>
+      <p:bgPr>
+        <a:solidFill>
+          <a:schemeClr val="tx1"/>
+        </a:solidFill>
+        <a:effectLst/>
+      </p:bgPr>
+    </p:bg>
+    <p:spTree>
+      <p:nvGrpSpPr>
+        <p:cNvPr id="1" name="">
+          <a:extLst>
+            <a:ext uri="{FF2B5EF4-FFF2-40B4-BE49-F238E27FC236}">
+              <a16:creationId xmlns:a16="http://schemas.microsoft.com/office/drawing/2014/main" id="{1B53F17C-35E4-6F9F-42D1-09E2F83302BD}"/>
+            </a:ext>
+          </a:extLst>
+        </p:cNvPr>
+        <p:cNvGrpSpPr/>
+        <p:nvPr/>
+      </p:nvGrpSpPr>
+      <p:grpSpPr>
+        <a:xfrm>
+          <a:off x="0" y="0"/>
+          <a:ext cx="0" cy="0"/>
+          <a:chOff x="0" y="0"/>
+          <a:chExt cx="0" cy="0"/>
+        </a:xfrm>
+      </p:grpSpPr>
+      <p:sp>
+        <p:nvSpPr>
+          <p:cNvPr id="3" name="Subtitle 2">
+            <a:extLst>
+              <a:ext uri="{FF2B5EF4-FFF2-40B4-BE49-F238E27FC236}">
+                <a16:creationId xmlns:a16="http://schemas.microsoft.com/office/drawing/2014/main" id="{E64B18C7-79F1-1390-01AA-F207805A221D}"/>
+              </a:ext>
+            </a:extLst>
+          </p:cNvPr>
+          <p:cNvSpPr>
+            <a:spLocks noGrp="1"/>
+          </p:cNvSpPr>
+          <p:nvPr>
+            <p:ph type="subTitle" idx="1"/>
+          </p:nvPr>
+        </p:nvSpPr>
+        <p:spPr>
+          <a:xfrm>
+            <a:off x="144379" y="228600"/>
+            <a:ext cx="8857381" cy="6431280"/>
+          </a:xfrm>
+        </p:spPr>
+        <p:txBody>
+          <a:bodyPr>
+            <a:noAutofit/>
+          </a:bodyPr>
+          <a:lstStyle/>
+          <a:p>
+            <a:endParaRPr lang="en-US" sz="4000" dirty="0">
+              <a:solidFill>
+                <a:schemeClr val="bg1"/>
+              </a:solidFill>
+              <a:latin typeface="Avenir Medium" panose="02000503020000020003" pitchFamily="2" charset="0"/>
+              <a:ea typeface="Bodoni Ornaments" pitchFamily="2" charset="0"/>
+            </a:endParaRPr>
+          </a:p>
+          <a:p>
+            <a:r>
+              <a:rPr lang="en-US" sz="4000" dirty="0">
+                <a:solidFill>
+                  <a:schemeClr val="bg1"/>
+                </a:solidFill>
+                <a:latin typeface="Avenir Medium" panose="02000503020000020003" pitchFamily="2" charset="0"/>
+                <a:ea typeface="Bodoni Ornaments" pitchFamily="2" charset="0"/>
+              </a:rPr>
+              <a:t>Age after age to be </a:t>
+            </a:r>
+          </a:p>
+          <a:p>
+            <a:r>
+              <a:rPr lang="en-US" sz="4000" dirty="0">
+                <a:solidFill>
+                  <a:schemeClr val="bg1"/>
+                </a:solidFill>
+                <a:latin typeface="Avenir Medium" panose="02000503020000020003" pitchFamily="2" charset="0"/>
+                <a:ea typeface="Bodoni Ornaments" pitchFamily="2" charset="0"/>
+              </a:rPr>
+              <a:t>Nearer my God to Thee</a:t>
+            </a:r>
+          </a:p>
+          <a:p>
+            <a:r>
+              <a:rPr lang="en-US" sz="4000" dirty="0">
+                <a:solidFill>
+                  <a:schemeClr val="bg1"/>
+                </a:solidFill>
+                <a:latin typeface="Avenir Medium" panose="02000503020000020003" pitchFamily="2" charset="0"/>
+                <a:ea typeface="Bodoni Ornaments" pitchFamily="2" charset="0"/>
+              </a:rPr>
+              <a:t>Nearer my God to Thee, </a:t>
+            </a:r>
+          </a:p>
+          <a:p>
+            <a:r>
+              <a:rPr lang="en-US" sz="4000" dirty="0">
+                <a:solidFill>
+                  <a:schemeClr val="bg1"/>
+                </a:solidFill>
+                <a:latin typeface="Avenir Medium" panose="02000503020000020003" pitchFamily="2" charset="0"/>
+                <a:ea typeface="Bodoni Ornaments" pitchFamily="2" charset="0"/>
+              </a:rPr>
+              <a:t>nearer to Thee</a:t>
+            </a:r>
+          </a:p>
+          <a:p>
+            <a:endParaRPr lang="en-US" sz="4000" dirty="0">
+              <a:solidFill>
+                <a:schemeClr val="bg1"/>
+              </a:solidFill>
+              <a:latin typeface="Avenir Medium" panose="02000503020000020003" pitchFamily="2" charset="0"/>
+              <a:ea typeface="Bodoni Ornaments" pitchFamily="2" charset="0"/>
+            </a:endParaRPr>
+          </a:p>
         </p:txBody>
       </p:sp>
       <p:sp>
@@ -3733,7 +4162,7 @@
           <p:cNvPr id="2" name="TextBox 1">
             <a:extLst>
               <a:ext uri="{FF2B5EF4-FFF2-40B4-BE49-F238E27FC236}">
-                <a16:creationId xmlns:a16="http://schemas.microsoft.com/office/drawing/2014/main" id="{5DE5347E-CB9A-43DD-8F01-CD210F411994}"/>
+                <a16:creationId xmlns:a16="http://schemas.microsoft.com/office/drawing/2014/main" id="{ABAE35BF-EC62-70CE-D294-E839A0BE2222}"/>
               </a:ext>
             </a:extLst>
           </p:cNvPr>
@@ -3770,7 +4199,7 @@
     </p:spTree>
     <p:extLst>
       <p:ext uri="{BB962C8B-B14F-4D97-AF65-F5344CB8AC3E}">
-        <p14:creationId xmlns:p14="http://schemas.microsoft.com/office/powerpoint/2010/main" val="2718413055"/>
+        <p14:creationId xmlns:p14="http://schemas.microsoft.com/office/powerpoint/2010/main" val="4196185204"/>
       </p:ext>
     </p:extLst>
   </p:cSld>
